--- a/examples/ppt169_arabic_coffee_ar/exports/ppt169_arabic_coffee_ar_native_charts_tables.pptx
+++ b/examples/ppt169_arabic_coffee_ar/exports/ppt169_arabic_coffee_ar_native_charts_tables.pptx
@@ -31,7 +31,7 @@
       <a:defRPr lang="ar-SA"/>
     </a:defPPr>
     <a:lvl1pPr marL="0" algn="r" defTabSz="457200" rtl="1" eaLnBrk="1" latinLnBrk="0" hangingPunct="1">
-      <a:defRPr sz="1800" kern="1200">
+      <a:defRPr sz="1800" kern="1200" lang="ar-SA">
         <a:solidFill>
           <a:schemeClr val="tx1"/>
         </a:solidFill>
@@ -41,7 +41,7 @@
       </a:defRPr>
     </a:lvl1pPr>
     <a:lvl2pPr marL="457200" algn="r" defTabSz="457200" rtl="1" eaLnBrk="1" latinLnBrk="0" hangingPunct="1">
-      <a:defRPr sz="1800" kern="1200">
+      <a:defRPr sz="1800" kern="1200" lang="ar-SA">
         <a:solidFill>
           <a:schemeClr val="tx1"/>
         </a:solidFill>
@@ -51,7 +51,7 @@
       </a:defRPr>
     </a:lvl2pPr>
     <a:lvl3pPr marL="914400" algn="r" defTabSz="457200" rtl="1" eaLnBrk="1" latinLnBrk="0" hangingPunct="1">
-      <a:defRPr sz="1800" kern="1200">
+      <a:defRPr sz="1800" kern="1200" lang="ar-SA">
         <a:solidFill>
           <a:schemeClr val="tx1"/>
         </a:solidFill>
@@ -61,7 +61,7 @@
       </a:defRPr>
     </a:lvl3pPr>
     <a:lvl4pPr marL="1371600" algn="r" defTabSz="457200" rtl="1" eaLnBrk="1" latinLnBrk="0" hangingPunct="1">
-      <a:defRPr sz="1800" kern="1200">
+      <a:defRPr sz="1800" kern="1200" lang="ar-SA">
         <a:solidFill>
           <a:schemeClr val="tx1"/>
         </a:solidFill>
@@ -71,7 +71,7 @@
       </a:defRPr>
     </a:lvl4pPr>
     <a:lvl5pPr marL="1828800" algn="r" defTabSz="457200" rtl="1" eaLnBrk="1" latinLnBrk="0" hangingPunct="1">
-      <a:defRPr sz="1800" kern="1200">
+      <a:defRPr sz="1800" kern="1200" lang="ar-SA">
         <a:solidFill>
           <a:schemeClr val="tx1"/>
         </a:solidFill>
@@ -81,7 +81,7 @@
       </a:defRPr>
     </a:lvl5pPr>
     <a:lvl6pPr marL="2286000" algn="r" defTabSz="457200" rtl="1" eaLnBrk="1" latinLnBrk="0" hangingPunct="1">
-      <a:defRPr sz="1800" kern="1200">
+      <a:defRPr sz="1800" kern="1200" lang="ar-SA">
         <a:solidFill>
           <a:schemeClr val="tx1"/>
         </a:solidFill>
@@ -91,7 +91,7 @@
       </a:defRPr>
     </a:lvl6pPr>
     <a:lvl7pPr marL="2743200" algn="r" defTabSz="457200" rtl="1" eaLnBrk="1" latinLnBrk="0" hangingPunct="1">
-      <a:defRPr sz="1800" kern="1200">
+      <a:defRPr sz="1800" kern="1200" lang="ar-SA">
         <a:solidFill>
           <a:schemeClr val="tx1"/>
         </a:solidFill>
@@ -101,7 +101,7 @@
       </a:defRPr>
     </a:lvl7pPr>
     <a:lvl8pPr marL="3200400" algn="r" defTabSz="457200" rtl="1" eaLnBrk="1" latinLnBrk="0" hangingPunct="1">
-      <a:defRPr sz="1800" kern="1200">
+      <a:defRPr sz="1800" kern="1200" lang="ar-SA">
         <a:solidFill>
           <a:schemeClr val="tx1"/>
         </a:solidFill>
@@ -111,7 +111,7 @@
       </a:defRPr>
     </a:lvl8pPr>
     <a:lvl9pPr marL="3657600" algn="r" defTabSz="457200" rtl="1" eaLnBrk="1" latinLnBrk="0" hangingPunct="1">
-      <a:defRPr sz="1800" kern="1200">
+      <a:defRPr sz="1800" kern="1200" lang="ar-SA">
         <a:solidFill>
           <a:schemeClr val="tx1"/>
         </a:solidFill>
@@ -1761,7 +1761,7 @@
           <a:bodyPr vert="horz" lIns="91440" tIns="45720" rIns="91440" bIns="45720" rtlCol="0" anchor="ctr"/>
           <a:lstStyle>
             <a:lvl1pPr algn="l">
-              <a:defRPr sz="1200">
+              <a:defRPr sz="1200" lang="ar-SA">
                 <a:solidFill>
                   <a:schemeClr val="tx1">
                     <a:tint val="75000"/>
@@ -1802,7 +1802,7 @@
           <a:bodyPr vert="horz" lIns="91440" tIns="45720" rIns="91440" bIns="45720" rtlCol="0" anchor="ctr"/>
           <a:lstStyle>
             <a:lvl1pPr algn="ctr">
-              <a:defRPr sz="1200">
+              <a:defRPr sz="1200" lang="ar-SA">
                 <a:solidFill>
                   <a:schemeClr val="tx1">
                     <a:tint val="75000"/>
@@ -1839,7 +1839,7 @@
           <a:bodyPr vert="horz" lIns="91440" tIns="45720" rIns="91440" bIns="45720" rtlCol="0" anchor="ctr"/>
           <a:lstStyle>
             <a:lvl1pPr algn="r">
-              <a:defRPr sz="1200">
+              <a:defRPr sz="1200" lang="ar-SA">
                 <a:solidFill>
                   <a:schemeClr val="tx1">
                     <a:tint val="75000"/>
@@ -1870,7 +1870,7 @@
           <a:spcPct val="0"/>
         </a:spcBef>
         <a:buNone/>
-        <a:defRPr sz="3600" kern="1200">
+        <a:defRPr sz="3600" kern="1200" lang="ar-SA">
           <a:solidFill>
             <a:schemeClr val="tx1"/>
           </a:solidFill>
@@ -1887,7 +1887,7 @@
         </a:spcBef>
         <a:buFont typeface="Arial"/>
         <a:buChar char="•"/>
-        <a:defRPr sz="1950" kern="1200">
+        <a:defRPr sz="1950" kern="1200" lang="ar-SA">
           <a:solidFill>
             <a:schemeClr val="tx1"/>
           </a:solidFill>
@@ -1902,7 +1902,7 @@
         </a:spcBef>
         <a:buFont typeface="Arial"/>
         <a:buChar char="–"/>
-        <a:defRPr sz="1850" kern="1200">
+        <a:defRPr sz="1850" kern="1200" lang="ar-SA">
           <a:solidFill>
             <a:schemeClr val="tx1"/>
           </a:solidFill>
@@ -1917,7 +1917,7 @@
         </a:spcBef>
         <a:buFont typeface="Arial"/>
         <a:buChar char="•"/>
-        <a:defRPr sz="1700" kern="1200">
+        <a:defRPr sz="1700" kern="1200" lang="ar-SA">
           <a:solidFill>
             <a:schemeClr val="tx1"/>
           </a:solidFill>
@@ -1932,7 +1932,7 @@
         </a:spcBef>
         <a:buFont typeface="Arial"/>
         <a:buChar char="–"/>
-        <a:defRPr sz="1600" kern="1200">
+        <a:defRPr sz="1600" kern="1200" lang="ar-SA">
           <a:solidFill>
             <a:schemeClr val="tx1"/>
           </a:solidFill>
@@ -1947,7 +1947,7 @@
         </a:spcBef>
         <a:buFont typeface="Arial"/>
         <a:buChar char="»"/>
-        <a:defRPr sz="1450" kern="1200">
+        <a:defRPr sz="1450" kern="1200" lang="ar-SA">
           <a:solidFill>
             <a:schemeClr val="tx1"/>
           </a:solidFill>
@@ -1962,7 +1962,7 @@
         </a:spcBef>
         <a:buFont typeface="Arial"/>
         <a:buChar char="•"/>
-        <a:defRPr sz="1350" kern="1200">
+        <a:defRPr sz="1350" kern="1200" lang="ar-SA">
           <a:solidFill>
             <a:schemeClr val="tx1"/>
           </a:solidFill>
@@ -1977,7 +1977,7 @@
         </a:spcBef>
         <a:buFont typeface="Arial"/>
         <a:buChar char="•"/>
-        <a:defRPr sz="1200" kern="1200">
+        <a:defRPr sz="1200" kern="1200" lang="ar-SA">
           <a:solidFill>
             <a:schemeClr val="tx1"/>
           </a:solidFill>
@@ -1992,7 +1992,7 @@
         </a:spcBef>
         <a:buFont typeface="Arial"/>
         <a:buChar char="•"/>
-        <a:defRPr sz="1100" kern="1200">
+        <a:defRPr sz="1100" kern="1200" lang="ar-SA">
           <a:solidFill>
             <a:schemeClr val="tx1"/>
           </a:solidFill>
@@ -2007,7 +2007,7 @@
         </a:spcBef>
         <a:buFont typeface="Arial"/>
         <a:buChar char="•"/>
-        <a:defRPr sz="1000" kern="1200">
+        <a:defRPr sz="1000" kern="1200" lang="ar-SA">
           <a:solidFill>
             <a:schemeClr val="tx1"/>
           </a:solidFill>
@@ -2022,7 +2022,7 @@
         <a:defRPr lang="ar-SA"/>
       </a:defPPr>
       <a:lvl1pPr marL="0" algn="r" defTabSz="457200" rtl="1" eaLnBrk="1" latinLnBrk="0" hangingPunct="1">
-        <a:defRPr sz="1950" kern="1200">
+        <a:defRPr sz="1950" kern="1200" lang="ar-SA">
           <a:solidFill>
             <a:schemeClr val="tx1"/>
           </a:solidFill>
@@ -2032,7 +2032,7 @@
         </a:defRPr>
       </a:lvl1pPr>
       <a:lvl2pPr marL="457200" algn="r" defTabSz="457200" rtl="1" eaLnBrk="1" latinLnBrk="0" hangingPunct="1">
-        <a:defRPr sz="1850" kern="1200">
+        <a:defRPr sz="1850" kern="1200" lang="ar-SA">
           <a:solidFill>
             <a:schemeClr val="tx1"/>
           </a:solidFill>
@@ -2042,7 +2042,7 @@
         </a:defRPr>
       </a:lvl2pPr>
       <a:lvl3pPr marL="914400" algn="r" defTabSz="457200" rtl="1" eaLnBrk="1" latinLnBrk="0" hangingPunct="1">
-        <a:defRPr sz="1700" kern="1200">
+        <a:defRPr sz="1700" kern="1200" lang="ar-SA">
           <a:solidFill>
             <a:schemeClr val="tx1"/>
           </a:solidFill>
@@ -2052,7 +2052,7 @@
         </a:defRPr>
       </a:lvl3pPr>
       <a:lvl4pPr marL="1371600" algn="r" defTabSz="457200" rtl="1" eaLnBrk="1" latinLnBrk="0" hangingPunct="1">
-        <a:defRPr sz="1600" kern="1200">
+        <a:defRPr sz="1600" kern="1200" lang="ar-SA">
           <a:solidFill>
             <a:schemeClr val="tx1"/>
           </a:solidFill>
@@ -2062,7 +2062,7 @@
         </a:defRPr>
       </a:lvl4pPr>
       <a:lvl5pPr marL="1828800" algn="r" defTabSz="457200" rtl="1" eaLnBrk="1" latinLnBrk="0" hangingPunct="1">
-        <a:defRPr sz="1450" kern="1200">
+        <a:defRPr sz="1450" kern="1200" lang="ar-SA">
           <a:solidFill>
             <a:schemeClr val="tx1"/>
           </a:solidFill>
@@ -2072,7 +2072,7 @@
         </a:defRPr>
       </a:lvl5pPr>
       <a:lvl6pPr marL="2286000" algn="r" defTabSz="457200" rtl="1" eaLnBrk="1" latinLnBrk="0" hangingPunct="1">
-        <a:defRPr sz="1350" kern="1200">
+        <a:defRPr sz="1350" kern="1200" lang="ar-SA">
           <a:solidFill>
             <a:schemeClr val="tx1"/>
           </a:solidFill>
@@ -2082,7 +2082,7 @@
         </a:defRPr>
       </a:lvl6pPr>
       <a:lvl7pPr marL="2743200" algn="r" defTabSz="457200" rtl="1" eaLnBrk="1" latinLnBrk="0" hangingPunct="1">
-        <a:defRPr sz="1200" kern="1200">
+        <a:defRPr sz="1200" kern="1200" lang="ar-SA">
           <a:solidFill>
             <a:schemeClr val="tx1"/>
           </a:solidFill>
@@ -2092,7 +2092,7 @@
         </a:defRPr>
       </a:lvl7pPr>
       <a:lvl8pPr marL="3200400" algn="r" defTabSz="457200" rtl="1" eaLnBrk="1" latinLnBrk="0" hangingPunct="1">
-        <a:defRPr sz="1100" kern="1200">
+        <a:defRPr sz="1100" kern="1200" lang="ar-SA">
           <a:solidFill>
             <a:schemeClr val="tx1"/>
           </a:solidFill>
@@ -2102,7 +2102,7 @@
         </a:defRPr>
       </a:lvl8pPr>
       <a:lvl9pPr marL="3657600" algn="r" defTabSz="457200" rtl="1" eaLnBrk="1" latinLnBrk="0" hangingPunct="1">
-        <a:defRPr sz="1000" kern="1200">
+        <a:defRPr sz="1000" kern="1200" lang="ar-SA">
           <a:solidFill>
             <a:schemeClr val="tx1"/>
           </a:solidFill>
@@ -18031,7 +18031,7 @@
                       <a:r>
                         <a:rPr lang="ar-SA" sz="1800" b="1">
                           <a:solidFill>
-                            <a:schemeClr val="dk1"/>
+                            <a:srgbClr val="F6EFE4"/>
                           </a:solidFill>
                           <a:latin typeface="Segoe UI"/>
                           <a:ea typeface="Microsoft YaHei"/>
@@ -18072,7 +18072,7 @@
                       <a:r>
                         <a:rPr lang="ar-SA" sz="1800" b="1">
                           <a:solidFill>
-                            <a:schemeClr val="dk1"/>
+                            <a:srgbClr val="F6EFE4"/>
                           </a:solidFill>
                           <a:latin typeface="Segoe UI"/>
                           <a:ea typeface="Microsoft YaHei"/>
@@ -18113,7 +18113,7 @@
                       <a:r>
                         <a:rPr lang="ar-SA" sz="1800" b="1">
                           <a:solidFill>
-                            <a:schemeClr val="dk1"/>
+                            <a:srgbClr val="F6EFE4"/>
                           </a:solidFill>
                           <a:latin typeface="Segoe UI"/>
                           <a:ea typeface="Microsoft YaHei"/>
